--- a/ppt/BigData08-MongoDB.pptx
+++ b/ppt/BigData08-MongoDB.pptx
@@ -4547,11 +4547,7 @@
             <a:pPr lvl="1"/>
             <a:r>
               <a:rPr lang="fr-FR" dirty="0"/>
-              <a:t>JSON n’est </a:t>
-            </a:r>
-            <a:r>
-              <a:rPr lang="fr-FR"/>
-              <a:t>pas atomique</a:t>
+              <a:t>JSON n’est pas atomique</a:t>
             </a:r>
           </a:p>
           <a:p>
@@ -4577,7 +4573,15 @@
             <a:pPr lvl="1"/>
             <a:r>
               <a:rPr lang="fr-FR" dirty="0"/>
-              <a:t>Les champs de ne sont pas typés et les relations non vérifiées</a:t>
+              <a:t>Les champs </a:t>
+            </a:r>
+            <a:r>
+              <a:rPr lang="fr-FR"/>
+              <a:t>peuvent être typés </a:t>
+            </a:r>
+            <a:r>
+              <a:rPr lang="fr-FR" dirty="0"/>
+              <a:t>et les relations non vérifiées</a:t>
             </a:r>
           </a:p>
           <a:p>
